--- a/Clase_5/PPTs/Clase05_RegresionLogistica.pptx
+++ b/Clase_5/PPTs/Clase05_RegresionLogistica.pptx
@@ -3749,7 +3749,7 @@
         </p:nvSpPr>
         <p:spPr>
           <a:xfrm>
-            <a:off x="4553712" y="3090672"/>
+            <a:off x="4572000" y="3108776"/>
             <a:ext cx="4407408" cy="502920"/>
           </a:xfrm>
           <a:prstGeom prst="rect">
@@ -3869,7 +3869,7 @@
               <a:buNone/>
             </a:pPr>
             <a:r>
-              <a:rPr lang="en-US" sz="950" dirty="0">
+              <a:rPr lang="en-US" sz="950" b="1" dirty="0">
                 <a:solidFill>
                   <a:srgbClr val="2E86C1"/>
                 </a:solidFill>
@@ -3879,7 +3879,280 @@
               </a:rPr>
               <a:t>MLE — iterativa (GD/BFGS)</a:t>
             </a:r>
-            <a:endParaRPr lang="en-US" sz="950" dirty="0"/>
+          </a:p>
+          <a:p>
+            <a:r>
+              <a:rPr lang="en-US" sz="800" b="1" dirty="0">
+                <a:solidFill>
+                  <a:srgbClr val="2E86C1"/>
+                </a:solidFill>
+                <a:latin typeface="Courier New" pitchFamily="34" charset="0"/>
+                <a:cs typeface="Courier New" pitchFamily="34" charset="-120"/>
+              </a:rPr>
+              <a:t>BFGS</a:t>
+            </a:r>
+            <a:r>
+              <a:rPr lang="en-US" sz="800" dirty="0">
+                <a:solidFill>
+                  <a:srgbClr val="2E86C1"/>
+                </a:solidFill>
+                <a:latin typeface="Courier New" pitchFamily="34" charset="0"/>
+                <a:cs typeface="Courier New" pitchFamily="34" charset="-120"/>
+              </a:rPr>
+              <a:t> (</a:t>
+            </a:r>
+            <a:r>
+              <a:rPr lang="en-US" sz="800" dirty="0" err="1">
+                <a:solidFill>
+                  <a:srgbClr val="2E86C1"/>
+                </a:solidFill>
+                <a:latin typeface="Courier New" pitchFamily="34" charset="0"/>
+                <a:cs typeface="Courier New" pitchFamily="34" charset="-120"/>
+              </a:rPr>
+              <a:t>Broyden</a:t>
+            </a:r>
+            <a:r>
+              <a:rPr lang="en-US" sz="800" dirty="0">
+                <a:solidFill>
+                  <a:srgbClr val="2E86C1"/>
+                </a:solidFill>
+                <a:latin typeface="Courier New" pitchFamily="34" charset="0"/>
+                <a:cs typeface="Courier New" pitchFamily="34" charset="-120"/>
+              </a:rPr>
+              <a:t>-Fletcher-Goldfarb-Shanno)</a:t>
+            </a:r>
+          </a:p>
+          <a:p>
+            <a:r>
+              <a:rPr lang="en-US" sz="800" dirty="0">
+                <a:solidFill>
+                  <a:srgbClr val="2E86C1"/>
+                </a:solidFill>
+                <a:latin typeface="Courier New" pitchFamily="34" charset="0"/>
+                <a:cs typeface="Courier New" pitchFamily="34" charset="-120"/>
+              </a:rPr>
+              <a:t>motor </a:t>
+            </a:r>
+            <a:r>
+              <a:rPr lang="en-US" sz="800" dirty="0" err="1">
+                <a:solidFill>
+                  <a:srgbClr val="2E86C1"/>
+                </a:solidFill>
+                <a:latin typeface="Courier New" pitchFamily="34" charset="0"/>
+                <a:cs typeface="Courier New" pitchFamily="34" charset="-120"/>
+              </a:rPr>
+              <a:t>que</a:t>
+            </a:r>
+            <a:r>
+              <a:rPr lang="en-US" sz="800" dirty="0">
+                <a:solidFill>
+                  <a:srgbClr val="2E86C1"/>
+                </a:solidFill>
+                <a:latin typeface="Courier New" pitchFamily="34" charset="0"/>
+                <a:cs typeface="Courier New" pitchFamily="34" charset="-120"/>
+              </a:rPr>
+              <a:t> </a:t>
+            </a:r>
+            <a:r>
+              <a:rPr lang="en-US" sz="800" dirty="0" err="1">
+                <a:solidFill>
+                  <a:srgbClr val="2E86C1"/>
+                </a:solidFill>
+                <a:latin typeface="Courier New" pitchFamily="34" charset="0"/>
+                <a:cs typeface="Courier New" pitchFamily="34" charset="-120"/>
+              </a:rPr>
+              <a:t>encuentra</a:t>
+            </a:r>
+            <a:r>
+              <a:rPr lang="en-US" sz="800" dirty="0">
+                <a:solidFill>
+                  <a:srgbClr val="2E86C1"/>
+                </a:solidFill>
+                <a:latin typeface="Courier New" pitchFamily="34" charset="0"/>
+                <a:cs typeface="Courier New" pitchFamily="34" charset="-120"/>
+              </a:rPr>
+              <a:t> </a:t>
+            </a:r>
+            <a:r>
+              <a:rPr lang="en-US" sz="800" dirty="0" err="1">
+                <a:solidFill>
+                  <a:srgbClr val="2E86C1"/>
+                </a:solidFill>
+                <a:latin typeface="Courier New" pitchFamily="34" charset="0"/>
+                <a:cs typeface="Courier New" pitchFamily="34" charset="-120"/>
+              </a:rPr>
+              <a:t>los</a:t>
+            </a:r>
+            <a:r>
+              <a:rPr lang="en-US" sz="800" dirty="0">
+                <a:solidFill>
+                  <a:srgbClr val="2E86C1"/>
+                </a:solidFill>
+                <a:latin typeface="Courier New" pitchFamily="34" charset="0"/>
+                <a:cs typeface="Courier New" pitchFamily="34" charset="-120"/>
+              </a:rPr>
+              <a:t> </a:t>
+            </a:r>
+            <a:r>
+              <a:rPr lang="en-US" sz="800" dirty="0" err="1">
+                <a:solidFill>
+                  <a:srgbClr val="2E86C1"/>
+                </a:solidFill>
+                <a:latin typeface="Courier New" pitchFamily="34" charset="0"/>
+                <a:cs typeface="Courier New" pitchFamily="34" charset="-120"/>
+              </a:rPr>
+              <a:t>mejores</a:t>
+            </a:r>
+            <a:r>
+              <a:rPr lang="en-US" sz="800" dirty="0">
+                <a:solidFill>
+                  <a:srgbClr val="2E86C1"/>
+                </a:solidFill>
+                <a:latin typeface="Courier New" pitchFamily="34" charset="0"/>
+                <a:cs typeface="Courier New" pitchFamily="34" charset="-120"/>
+              </a:rPr>
+              <a:t> pesos para </a:t>
+            </a:r>
+            <a:r>
+              <a:rPr lang="en-US" sz="800" dirty="0" err="1">
+                <a:solidFill>
+                  <a:srgbClr val="2E86C1"/>
+                </a:solidFill>
+                <a:latin typeface="Courier New" pitchFamily="34" charset="0"/>
+                <a:cs typeface="Courier New" pitchFamily="34" charset="-120"/>
+              </a:rPr>
+              <a:t>que</a:t>
+            </a:r>
+            <a:r>
+              <a:rPr lang="en-US" sz="800" dirty="0">
+                <a:solidFill>
+                  <a:srgbClr val="2E86C1"/>
+                </a:solidFill>
+                <a:latin typeface="Courier New" pitchFamily="34" charset="0"/>
+                <a:cs typeface="Courier New" pitchFamily="34" charset="-120"/>
+              </a:rPr>
+              <a:t> </a:t>
+            </a:r>
+            <a:r>
+              <a:rPr lang="en-US" sz="800" dirty="0" err="1">
+                <a:solidFill>
+                  <a:srgbClr val="2E86C1"/>
+                </a:solidFill>
+                <a:latin typeface="Courier New" pitchFamily="34" charset="0"/>
+                <a:cs typeface="Courier New" pitchFamily="34" charset="-120"/>
+              </a:rPr>
+              <a:t>esa</a:t>
+            </a:r>
+            <a:r>
+              <a:rPr lang="en-US" sz="800" dirty="0">
+                <a:solidFill>
+                  <a:srgbClr val="2E86C1"/>
+                </a:solidFill>
+                <a:latin typeface="Courier New" pitchFamily="34" charset="0"/>
+                <a:cs typeface="Courier New" pitchFamily="34" charset="-120"/>
+              </a:rPr>
+              <a:t> </a:t>
+            </a:r>
+            <a:r>
+              <a:rPr lang="en-US" sz="800" dirty="0" err="1">
+                <a:solidFill>
+                  <a:srgbClr val="2E86C1"/>
+                </a:solidFill>
+                <a:latin typeface="Courier New" pitchFamily="34" charset="0"/>
+                <a:cs typeface="Courier New" pitchFamily="34" charset="-120"/>
+              </a:rPr>
+              <a:t>sigmoide</a:t>
+            </a:r>
+            <a:r>
+              <a:rPr lang="en-US" sz="800" dirty="0">
+                <a:solidFill>
+                  <a:srgbClr val="2E86C1"/>
+                </a:solidFill>
+                <a:latin typeface="Courier New" pitchFamily="34" charset="0"/>
+                <a:cs typeface="Courier New" pitchFamily="34" charset="-120"/>
+              </a:rPr>
+              <a:t> </a:t>
+            </a:r>
+            <a:r>
+              <a:rPr lang="en-US" sz="800" dirty="0" err="1">
+                <a:solidFill>
+                  <a:srgbClr val="2E86C1"/>
+                </a:solidFill>
+                <a:latin typeface="Courier New" pitchFamily="34" charset="0"/>
+                <a:cs typeface="Courier New" pitchFamily="34" charset="-120"/>
+              </a:rPr>
+              <a:t>encaje</a:t>
+            </a:r>
+            <a:r>
+              <a:rPr lang="en-US" sz="800" dirty="0">
+                <a:solidFill>
+                  <a:srgbClr val="2E86C1"/>
+                </a:solidFill>
+                <a:latin typeface="Courier New" pitchFamily="34" charset="0"/>
+                <a:cs typeface="Courier New" pitchFamily="34" charset="-120"/>
+              </a:rPr>
+              <a:t> </a:t>
+            </a:r>
+            <a:r>
+              <a:rPr lang="en-US" sz="800" dirty="0" err="1">
+                <a:solidFill>
+                  <a:srgbClr val="2E86C1"/>
+                </a:solidFill>
+                <a:latin typeface="Courier New" pitchFamily="34" charset="0"/>
+                <a:cs typeface="Courier New" pitchFamily="34" charset="-120"/>
+              </a:rPr>
+              <a:t>perfectamente</a:t>
+            </a:r>
+            <a:r>
+              <a:rPr lang="en-US" sz="800" dirty="0">
+                <a:solidFill>
+                  <a:srgbClr val="2E86C1"/>
+                </a:solidFill>
+                <a:latin typeface="Courier New" pitchFamily="34" charset="0"/>
+                <a:cs typeface="Courier New" pitchFamily="34" charset="-120"/>
+              </a:rPr>
+              <a:t> con </a:t>
+            </a:r>
+            <a:r>
+              <a:rPr lang="en-US" sz="800" dirty="0" err="1">
+                <a:solidFill>
+                  <a:srgbClr val="2E86C1"/>
+                </a:solidFill>
+                <a:latin typeface="Courier New" pitchFamily="34" charset="0"/>
+                <a:cs typeface="Courier New" pitchFamily="34" charset="-120"/>
+              </a:rPr>
+              <a:t>tus</a:t>
+            </a:r>
+            <a:r>
+              <a:rPr lang="en-US" sz="800" dirty="0">
+                <a:solidFill>
+                  <a:srgbClr val="2E86C1"/>
+                </a:solidFill>
+                <a:latin typeface="Courier New" pitchFamily="34" charset="0"/>
+                <a:cs typeface="Courier New" pitchFamily="34" charset="-120"/>
+              </a:rPr>
+              <a:t> </a:t>
+            </a:r>
+            <a:r>
+              <a:rPr lang="en-US" sz="800" dirty="0" err="1">
+                <a:solidFill>
+                  <a:srgbClr val="2E86C1"/>
+                </a:solidFill>
+                <a:latin typeface="Courier New" pitchFamily="34" charset="0"/>
+                <a:cs typeface="Courier New" pitchFamily="34" charset="-120"/>
+              </a:rPr>
+              <a:t>datos</a:t>
+            </a:r>
+            <a:r>
+              <a:rPr lang="en-US" sz="800" dirty="0">
+                <a:solidFill>
+                  <a:srgbClr val="2E86C1"/>
+                </a:solidFill>
+                <a:latin typeface="Courier New" pitchFamily="34" charset="0"/>
+                <a:cs typeface="Courier New" pitchFamily="34" charset="-120"/>
+              </a:rPr>
+              <a:t>.</a:t>
+            </a:r>
           </a:p>
         </p:txBody>
       </p:sp>
@@ -5001,7 +5274,29 @@
                 <a:ea typeface="Courier New" pitchFamily="34" charset="-122"/>
                 <a:cs typeface="Courier New" pitchFamily="34" charset="-120"/>
               </a:rPr>
-              <a:t>1 / (1 + e⁻ᶻ)</a:t>
+              <a:t>1 / (1 + e⁻</a:t>
+            </a:r>
+            <a:r>
+              <a:rPr lang="en-US" sz="1400" b="1" dirty="0">
+                <a:solidFill>
+                  <a:srgbClr val="1A5276"/>
+                </a:solidFill>
+                <a:latin typeface="Courier New" pitchFamily="34" charset="0"/>
+                <a:ea typeface="Courier New" pitchFamily="34" charset="-122"/>
+                <a:cs typeface="Courier New" pitchFamily="34" charset="-120"/>
+              </a:rPr>
+              <a:t>ᶻ</a:t>
+            </a:r>
+            <a:r>
+              <a:rPr lang="en-US" sz="1200" b="1" dirty="0">
+                <a:solidFill>
+                  <a:srgbClr val="1A5276"/>
+                </a:solidFill>
+                <a:latin typeface="Courier New" pitchFamily="34" charset="0"/>
+                <a:ea typeface="Courier New" pitchFamily="34" charset="-122"/>
+                <a:cs typeface="Courier New" pitchFamily="34" charset="-120"/>
+              </a:rPr>
+              <a:t>)</a:t>
             </a:r>
             <a:endParaRPr lang="en-US" sz="1200" dirty="0"/>
           </a:p>
@@ -5077,7 +5372,7 @@
         </p:nvSpPr>
         <p:spPr>
           <a:xfrm>
-            <a:off x="320040" y="4443984"/>
+            <a:off x="274320" y="4352544"/>
             <a:ext cx="8503920" cy="512064"/>
           </a:xfrm>
           <a:prstGeom prst="rect">
@@ -5093,6 +5388,13 @@
             <a:prstDash val="solid"/>
           </a:ln>
         </p:spPr>
+        <p:txBody>
+          <a:bodyPr/>
+          <a:lstStyle/>
+          <a:p>
+            <a:endParaRPr lang="en-PE" dirty="0"/>
+          </a:p>
+        </p:txBody>
       </p:sp>
       <p:sp>
         <p:nvSpPr>
@@ -5102,7 +5404,7 @@
         </p:nvSpPr>
         <p:spPr>
           <a:xfrm>
-            <a:off x="475488" y="4517136"/>
+            <a:off x="497888" y="4398264"/>
             <a:ext cx="8229600" cy="365760"/>
           </a:xfrm>
           <a:prstGeom prst="rect">
@@ -6304,7 +6606,7 @@
         </p:nvSpPr>
         <p:spPr>
           <a:xfrm>
-            <a:off x="475488" y="4517136"/>
+            <a:off x="502920" y="4480560"/>
             <a:ext cx="8229600" cy="237744"/>
           </a:xfrm>
           <a:prstGeom prst="rect">
@@ -8622,7 +8924,7 @@
         </p:nvSpPr>
         <p:spPr>
           <a:xfrm>
-            <a:off x="320040" y="4498848"/>
+            <a:off x="338328" y="4433521"/>
             <a:ext cx="8503920" cy="457200"/>
           </a:xfrm>
           <a:prstGeom prst="rect">
@@ -8647,7 +8949,7 @@
         </p:nvSpPr>
         <p:spPr>
           <a:xfrm>
-            <a:off x="475488" y="4572000"/>
+            <a:off x="457200" y="4462272"/>
             <a:ext cx="8229600" cy="329184"/>
           </a:xfrm>
           <a:prstGeom prst="rect">
